--- a/examples/ppt/charts/charts-stock.pptx
+++ b/examples/ppt/charts/charts-stock.pptx
@@ -5,14 +5,14 @@
     <p:sldMasterId xmlns:r="http://schemas.openxmlformats.org/officeDocument/2006/relationships" id="2147483648" r:id="rId1"/>
   </p:sldMasterIdLst>
   <p:sldIdLst>
-    <p:sldId id="256" r:id="R61758a8e627d4ad5"/>
-    <p:sldId id="257" r:id="R0e4f48f270394d0f"/>
-    <p:sldId id="258" r:id="Rfe234bb63d5a4b64"/>
-    <p:sldId id="259" r:id="R9feccaec695c471d"/>
-    <p:sldId id="260" r:id="R56f07472a142465e"/>
-    <p:sldId id="261" r:id="R013ce6e1c8f047df"/>
-    <p:sldId id="262" r:id="R4a32a323fdac4e3f"/>
-    <p:sldId id="263" r:id="R0cd6953d856640b4"/>
+    <p:sldId id="256" r:id="Rec0111cbbad14b25"/>
+    <p:sldId id="257" r:id="Rc6b8d94e449846da"/>
+    <p:sldId id="258" r:id="R7a58a7c22ac64f91"/>
+    <p:sldId id="259" r:id="R12f2ae10ff074827"/>
+    <p:sldId id="260" r:id="Rab38022e425e45d8"/>
+    <p:sldId id="261" r:id="R5f0f0882438a4232"/>
+    <p:sldId id="262" r:id="R2697221b66f84b06"/>
+    <p:sldId id="263" r:id="Rdcdb8c71ee7c447c"/>
   </p:sldIdLst>
   <p:sldSz cx="12192000" cy="6858000"/>
   <p:notesSz cx="6858000" cy="9144000"/>
@@ -287,7 +287,7 @@
 </file>
 
 <file path=ppt/slideMasters/slideMaster1.xml><?xml version="1.0" encoding="utf-8"?>
-<p:sldMaster xmlns:p="http://schemas.openxmlformats.org/presentationml/2006/main">
+<p:sldMaster xmlns:r="http://schemas.openxmlformats.org/officeDocument/2006/relationships" xmlns:p="http://schemas.openxmlformats.org/presentationml/2006/main">
   <p:cSld>
     <p:spTree>
       <p:nvGrpSpPr>
@@ -1457,10 +1457,12 @@
             <a:lstStyle xmlns:a="http://schemas.openxmlformats.org/drawingml/2006/main"/>
             <a:p xmlns:a="http://schemas.openxmlformats.org/drawingml/2006/main">
               <a:pPr>
-                <a:defRPr sz="900" b="0">
+                <a:defRPr sz="900">
                   <a:solidFill>
                     <a:srgbClr val="333333"/>
                   </a:solidFill>
+                  <a:latin typeface="Calibri"/>
+                  <a:ea typeface="Calibri"/>
                 </a:defRPr>
               </a:pPr>
             </a:p>
@@ -5627,9 +5629,11 @@
             <c:v>High</c:v>
           </c:tx>
           <c:spPr>
-            <a:solidFill xmlns:a="http://schemas.openxmlformats.org/drawingml/2006/main">
-              <a:srgbClr val="4472C4"/>
-            </a:solidFill>
+            <a:ln xmlns:a="http://schemas.openxmlformats.org/drawingml/2006/main" w="25400">
+              <a:solidFill>
+                <a:srgbClr val="4472C4"/>
+              </a:solidFill>
+            </a:ln>
           </c:spPr>
           <c:marker>
             <c:symbol val="none"/>
@@ -5683,9 +5687,11 @@
             <c:v>Low</c:v>
           </c:tx>
           <c:spPr>
-            <a:solidFill xmlns:a="http://schemas.openxmlformats.org/drawingml/2006/main">
-              <a:srgbClr val="ED7D31"/>
-            </a:solidFill>
+            <a:ln xmlns:a="http://schemas.openxmlformats.org/drawingml/2006/main" w="25400">
+              <a:solidFill>
+                <a:srgbClr val="ED7D31"/>
+              </a:solidFill>
+            </a:ln>
           </c:spPr>
           <c:marker>
             <c:symbol val="none"/>
@@ -5739,9 +5745,11 @@
             <c:v>Close</c:v>
           </c:tx>
           <c:spPr>
-            <a:solidFill xmlns:a="http://schemas.openxmlformats.org/drawingml/2006/main">
-              <a:srgbClr val="A5A5A5"/>
-            </a:solidFill>
+            <a:ln xmlns:a="http://schemas.openxmlformats.org/drawingml/2006/main" w="25400">
+              <a:solidFill>
+                <a:srgbClr val="A5A5A5"/>
+              </a:solidFill>
+            </a:ln>
           </c:spPr>
           <c:marker>
             <c:symbol val="none"/>
@@ -6169,9 +6177,11 @@
             <c:v>High</c:v>
           </c:tx>
           <c:spPr>
-            <a:solidFill xmlns:a="http://schemas.openxmlformats.org/drawingml/2006/main">
-              <a:srgbClr val="5B9BD5"/>
-            </a:solidFill>
+            <a:ln xmlns:a="http://schemas.openxmlformats.org/drawingml/2006/main" w="25400">
+              <a:solidFill>
+                <a:srgbClr val="5B9BD5"/>
+              </a:solidFill>
+            </a:ln>
           </c:spPr>
           <c:marker>
             <c:symbol val="none"/>
@@ -6225,9 +6235,11 @@
             <c:v>Low</c:v>
           </c:tx>
           <c:spPr>
-            <a:solidFill xmlns:a="http://schemas.openxmlformats.org/drawingml/2006/main">
-              <a:srgbClr val="FF6B6B"/>
-            </a:solidFill>
+            <a:ln xmlns:a="http://schemas.openxmlformats.org/drawingml/2006/main" w="25400">
+              <a:solidFill>
+                <a:srgbClr val="FF6B6B"/>
+              </a:solidFill>
+            </a:ln>
           </c:spPr>
           <c:marker>
             <c:symbol val="none"/>
@@ -6281,9 +6293,11 @@
             <c:v>Close</c:v>
           </c:tx>
           <c:spPr>
-            <a:solidFill xmlns:a="http://schemas.openxmlformats.org/drawingml/2006/main">
-              <a:srgbClr val="51CF66"/>
-            </a:solidFill>
+            <a:ln xmlns:a="http://schemas.openxmlformats.org/drawingml/2006/main" w="25400">
+              <a:solidFill>
+                <a:srgbClr val="51CF66"/>
+              </a:solidFill>
+            </a:ln>
           </c:spPr>
           <c:marker>
             <c:symbol val="none"/>
@@ -6489,9 +6503,11 @@
             <c:v>High</c:v>
           </c:tx>
           <c:spPr>
-            <a:solidFill xmlns:a="http://schemas.openxmlformats.org/drawingml/2006/main">
-              <a:srgbClr val="2E75B6"/>
-            </a:solidFill>
+            <a:ln xmlns:a="http://schemas.openxmlformats.org/drawingml/2006/main" w="25400">
+              <a:solidFill>
+                <a:srgbClr val="2E75B6"/>
+              </a:solidFill>
+            </a:ln>
           </c:spPr>
           <c:marker>
             <c:symbol val="none"/>
@@ -6545,9 +6561,11 @@
             <c:v>Low</c:v>
           </c:tx>
           <c:spPr>
-            <a:solidFill xmlns:a="http://schemas.openxmlformats.org/drawingml/2006/main">
-              <a:srgbClr val="44546A"/>
-            </a:solidFill>
+            <a:ln xmlns:a="http://schemas.openxmlformats.org/drawingml/2006/main" w="25400">
+              <a:solidFill>
+                <a:srgbClr val="44546A"/>
+              </a:solidFill>
+            </a:ln>
           </c:spPr>
           <c:marker>
             <c:symbol val="none"/>
@@ -6601,9 +6619,11 @@
             <c:v>Close</c:v>
           </c:tx>
           <c:spPr>
-            <a:solidFill xmlns:a="http://schemas.openxmlformats.org/drawingml/2006/main">
-              <a:srgbClr val="4472C4"/>
-            </a:solidFill>
+            <a:ln xmlns:a="http://schemas.openxmlformats.org/drawingml/2006/main" w="25400">
+              <a:solidFill>
+                <a:srgbClr val="4472C4"/>
+              </a:solidFill>
+            </a:ln>
           </c:spPr>
           <c:marker>
             <c:symbol val="none"/>
@@ -6800,9 +6820,11 @@
             <c:v>H</c:v>
           </c:tx>
           <c:spPr>
-            <a:solidFill xmlns:a="http://schemas.openxmlformats.org/drawingml/2006/main">
-              <a:srgbClr val="00AA00"/>
-            </a:solidFill>
+            <a:ln xmlns:a="http://schemas.openxmlformats.org/drawingml/2006/main" w="25400">
+              <a:solidFill>
+                <a:srgbClr val="00AA00"/>
+              </a:solidFill>
+            </a:ln>
           </c:spPr>
           <c:marker>
             <c:symbol val="none"/>
@@ -6856,9 +6878,11 @@
             <c:v>L</c:v>
           </c:tx>
           <c:spPr>
-            <a:solidFill xmlns:a="http://schemas.openxmlformats.org/drawingml/2006/main">
-              <a:srgbClr val="C00000"/>
-            </a:solidFill>
+            <a:ln xmlns:a="http://schemas.openxmlformats.org/drawingml/2006/main" w="25400">
+              <a:solidFill>
+                <a:srgbClr val="C00000"/>
+              </a:solidFill>
+            </a:ln>
           </c:spPr>
           <c:marker>
             <c:symbol val="none"/>
@@ -6912,9 +6936,11 @@
             <c:v>C</c:v>
           </c:tx>
           <c:spPr>
-            <a:solidFill xmlns:a="http://schemas.openxmlformats.org/drawingml/2006/main">
-              <a:srgbClr val="4472C4"/>
-            </a:solidFill>
+            <a:ln xmlns:a="http://schemas.openxmlformats.org/drawingml/2006/main" w="25400">
+              <a:solidFill>
+                <a:srgbClr val="4472C4"/>
+              </a:solidFill>
+            </a:ln>
           </c:spPr>
           <c:marker>
             <c:symbol val="none"/>
@@ -8685,8 +8711,8 @@
       <p:grpSpPr/>
       <p:sp>
         <p:nvSpPr>
-          <p:cNvPr id="10000" name="TextBox 1"/>
-          <p:cNvSpPr/>
+          <p:cNvPr id="100000" name="TextBox 1"/>
+          <p:cNvSpPr txBox="1"/>
           <p:nvPr/>
         </p:nvSpPr>
         <p:spPr>
@@ -8713,7 +8739,7 @@
       </p:sp>
       <p:graphicFrame>
         <p:nvGraphicFramePr>
-          <p:cNvPr id="10001" name="HLC"/>
+          <p:cNvPr id="100001" name="HLC"/>
           <p:cNvGraphicFramePr/>
           <p:nvPr/>
         </p:nvGraphicFramePr>
@@ -8723,13 +8749,13 @@
         </p:xfrm>
         <a:graphic xmlns:a="http://schemas.openxmlformats.org/drawingml/2006/main">
           <a:graphicData uri="http://schemas.openxmlformats.org/drawingml/2006/chart">
-            <c:chart xmlns:r="http://schemas.openxmlformats.org/officeDocument/2006/relationships" xmlns:c="http://schemas.openxmlformats.org/drawingml/2006/chart" r:id="R1c5d33a414394850"/>
+            <c:chart xmlns:r="http://schemas.openxmlformats.org/officeDocument/2006/relationships" xmlns:c="http://schemas.openxmlformats.org/drawingml/2006/chart" r:id="R09676ac7777c4c59"/>
           </a:graphicData>
         </a:graphic>
       </p:graphicFrame>
       <p:graphicFrame>
         <p:nvGraphicFramePr>
-          <p:cNvPr id="10002" name="OHLC"/>
+          <p:cNvPr id="100002" name="OHLC"/>
           <p:cNvGraphicFramePr/>
           <p:nvPr/>
         </p:nvGraphicFramePr>
@@ -8739,13 +8765,13 @@
         </p:xfrm>
         <a:graphic xmlns:a="http://schemas.openxmlformats.org/drawingml/2006/main">
           <a:graphicData uri="http://schemas.openxmlformats.org/drawingml/2006/chart">
-            <c:chart xmlns:r="http://schemas.openxmlformats.org/officeDocument/2006/relationships" xmlns:c="http://schemas.openxmlformats.org/drawingml/2006/chart" r:id="R966d6005bb764ae6"/>
+            <c:chart xmlns:r="http://schemas.openxmlformats.org/officeDocument/2006/relationships" xmlns:c="http://schemas.openxmlformats.org/drawingml/2006/chart" r:id="Ra04c0761e1c94b4b"/>
           </a:graphicData>
         </a:graphic>
       </p:graphicFrame>
       <p:graphicFrame>
         <p:nvGraphicFramePr>
-          <p:cNvPr id="10003" name="HLC + dataTable=true"/>
+          <p:cNvPr id="100003" name="HLC + dataTable=true"/>
           <p:cNvGraphicFramePr/>
           <p:nvPr/>
         </p:nvGraphicFramePr>
@@ -8755,13 +8781,13 @@
         </p:xfrm>
         <a:graphic xmlns:a="http://schemas.openxmlformats.org/drawingml/2006/main">
           <a:graphicData uri="http://schemas.openxmlformats.org/drawingml/2006/chart">
-            <c:chart xmlns:r="http://schemas.openxmlformats.org/officeDocument/2006/relationships" xmlns:c="http://schemas.openxmlformats.org/drawingml/2006/chart" r:id="Rbb702eaa9fa44007"/>
+            <c:chart xmlns:r="http://schemas.openxmlformats.org/officeDocument/2006/relationships" xmlns:c="http://schemas.openxmlformats.org/drawingml/2006/chart" r:id="R96ce860582804022"/>
           </a:graphicData>
         </a:graphic>
       </p:graphicFrame>
       <p:graphicFrame>
         <p:nvGraphicFramePr>
-          <p:cNvPr id="10004" name="OHLC + dataTable=true"/>
+          <p:cNvPr id="100004" name="OHLC + dataTable=true"/>
           <p:cNvGraphicFramePr/>
           <p:nvPr/>
         </p:nvGraphicFramePr>
@@ -8771,7 +8797,7 @@
         </p:xfrm>
         <a:graphic xmlns:a="http://schemas.openxmlformats.org/drawingml/2006/main">
           <a:graphicData uri="http://schemas.openxmlformats.org/drawingml/2006/chart">
-            <c:chart xmlns:r="http://schemas.openxmlformats.org/officeDocument/2006/relationships" xmlns:c="http://schemas.openxmlformats.org/drawingml/2006/chart" r:id="Rda526ecf717e4144"/>
+            <c:chart xmlns:r="http://schemas.openxmlformats.org/officeDocument/2006/relationships" xmlns:c="http://schemas.openxmlformats.org/drawingml/2006/chart" r:id="R5edb0bc48f2041db"/>
           </a:graphicData>
         </a:graphic>
       </p:graphicFrame>
@@ -8792,8 +8818,8 @@
       <p:grpSpPr/>
       <p:sp>
         <p:nvSpPr>
-          <p:cNvPr id="10005" name="TextBox 1"/>
-          <p:cNvSpPr/>
+          <p:cNvPr id="100005" name="TextBox 1"/>
+          <p:cNvSpPr txBox="1"/>
           <p:nvPr/>
         </p:nvSpPr>
         <p:spPr>
@@ -8820,7 +8846,7 @@
       </p:sp>
       <p:graphicFrame>
         <p:nvGraphicFramePr>
-          <p:cNvPr id="10006" name="hilowlines=true"/>
+          <p:cNvPr id="100006" name="hilowlines=true"/>
           <p:cNvGraphicFramePr/>
           <p:nvPr/>
         </p:nvGraphicFramePr>
@@ -8830,13 +8856,13 @@
         </p:xfrm>
         <a:graphic xmlns:a="http://schemas.openxmlformats.org/drawingml/2006/main">
           <a:graphicData uri="http://schemas.openxmlformats.org/drawingml/2006/chart">
-            <c:chart xmlns:r="http://schemas.openxmlformats.org/officeDocument/2006/relationships" xmlns:c="http://schemas.openxmlformats.org/drawingml/2006/chart" r:id="R0a739afa7a2c4041"/>
+            <c:chart xmlns:r="http://schemas.openxmlformats.org/officeDocument/2006/relationships" xmlns:c="http://schemas.openxmlformats.org/drawingml/2006/chart" r:id="R4459eb4e9c5f4a48"/>
           </a:graphicData>
         </a:graphic>
       </p:graphicFrame>
       <p:graphicFrame>
         <p:nvGraphicFramePr>
-          <p:cNvPr id="10007" name="hilowlines=808080:0.5"/>
+          <p:cNvPr id="100007" name="hilowlines=808080:0.5"/>
           <p:cNvGraphicFramePr/>
           <p:nvPr/>
         </p:nvGraphicFramePr>
@@ -8846,13 +8872,13 @@
         </p:xfrm>
         <a:graphic xmlns:a="http://schemas.openxmlformats.org/drawingml/2006/main">
           <a:graphicData uri="http://schemas.openxmlformats.org/drawingml/2006/chart">
-            <c:chart xmlns:r="http://schemas.openxmlformats.org/officeDocument/2006/relationships" xmlns:c="http://schemas.openxmlformats.org/drawingml/2006/chart" r:id="Raf9a63d758234e7e"/>
+            <c:chart xmlns:r="http://schemas.openxmlformats.org/officeDocument/2006/relationships" xmlns:c="http://schemas.openxmlformats.org/drawingml/2006/chart" r:id="Rc7325ef57d294c2f"/>
           </a:graphicData>
         </a:graphic>
       </p:graphicFrame>
       <p:graphicFrame>
         <p:nvGraphicFramePr>
-          <p:cNvPr id="10008" name="updownbars=true (OHLC)"/>
+          <p:cNvPr id="100008" name="updownbars=true (OHLC)"/>
           <p:cNvGraphicFramePr/>
           <p:nvPr/>
         </p:nvGraphicFramePr>
@@ -8862,13 +8888,13 @@
         </p:xfrm>
         <a:graphic xmlns:a="http://schemas.openxmlformats.org/drawingml/2006/main">
           <a:graphicData uri="http://schemas.openxmlformats.org/drawingml/2006/chart">
-            <c:chart xmlns:r="http://schemas.openxmlformats.org/officeDocument/2006/relationships" xmlns:c="http://schemas.openxmlformats.org/drawingml/2006/chart" r:id="R44937f02463e4c1d"/>
+            <c:chart xmlns:r="http://schemas.openxmlformats.org/officeDocument/2006/relationships" xmlns:c="http://schemas.openxmlformats.org/drawingml/2006/chart" r:id="Rda811cc3eba44bca"/>
           </a:graphicData>
         </a:graphic>
       </p:graphicFrame>
       <p:graphicFrame>
         <p:nvGraphicFramePr>
-          <p:cNvPr id="10009" name="updownbars=150:00AA00:FF0000"/>
+          <p:cNvPr id="100009" name="updownbars=150:00AA00:FF0000"/>
           <p:cNvGraphicFramePr/>
           <p:nvPr/>
         </p:nvGraphicFramePr>
@@ -8878,7 +8904,7 @@
         </p:xfrm>
         <a:graphic xmlns:a="http://schemas.openxmlformats.org/drawingml/2006/main">
           <a:graphicData uri="http://schemas.openxmlformats.org/drawingml/2006/chart">
-            <c:chart xmlns:r="http://schemas.openxmlformats.org/officeDocument/2006/relationships" xmlns:c="http://schemas.openxmlformats.org/drawingml/2006/chart" r:id="R8516fc36bca54c1f"/>
+            <c:chart xmlns:r="http://schemas.openxmlformats.org/officeDocument/2006/relationships" xmlns:c="http://schemas.openxmlformats.org/drawingml/2006/chart" r:id="Ra064d04f1bd14a92"/>
           </a:graphicData>
         </a:graphic>
       </p:graphicFrame>
@@ -8899,8 +8925,8 @@
       <p:grpSpPr/>
       <p:sp>
         <p:nvSpPr>
-          <p:cNvPr id="10010" name="TextBox 1"/>
-          <p:cNvSpPr/>
+          <p:cNvPr id="100010" name="TextBox 1"/>
+          <p:cNvSpPr txBox="1"/>
           <p:nvPr/>
         </p:nvSpPr>
         <p:spPr>
@@ -8927,7 +8953,7 @@
       </p:sp>
       <p:graphicFrame>
         <p:nvGraphicFramePr>
-          <p:cNvPr id="10011" name="Styled title"/>
+          <p:cNvPr id="100011" name="Styled title"/>
           <p:cNvGraphicFramePr/>
           <p:nvPr/>
         </p:nvGraphicFramePr>
@@ -8937,13 +8963,13 @@
         </p:xfrm>
         <a:graphic xmlns:a="http://schemas.openxmlformats.org/drawingml/2006/main">
           <a:graphicData uri="http://schemas.openxmlformats.org/drawingml/2006/chart">
-            <c:chart xmlns:r="http://schemas.openxmlformats.org/officeDocument/2006/relationships" xmlns:c="http://schemas.openxmlformats.org/drawingml/2006/chart" r:id="Re8546c608703410c"/>
+            <c:chart xmlns:r="http://schemas.openxmlformats.org/officeDocument/2006/relationships" xmlns:c="http://schemas.openxmlformats.org/drawingml/2006/chart" r:id="Rdf2bb59252f144bc"/>
           </a:graphicData>
         </a:graphic>
       </p:graphicFrame>
       <p:graphicFrame>
         <p:nvGraphicFramePr>
-          <p:cNvPr id="10012" name="legend=top + legendFont"/>
+          <p:cNvPr id="100012" name="legend=top + legendFont"/>
           <p:cNvGraphicFramePr/>
           <p:nvPr/>
         </p:nvGraphicFramePr>
@@ -8953,13 +8979,13 @@
         </p:xfrm>
         <a:graphic xmlns:a="http://schemas.openxmlformats.org/drawingml/2006/main">
           <a:graphicData uri="http://schemas.openxmlformats.org/drawingml/2006/chart">
-            <c:chart xmlns:r="http://schemas.openxmlformats.org/officeDocument/2006/relationships" xmlns:c="http://schemas.openxmlformats.org/drawingml/2006/chart" r:id="R2cd92a2660c14adf"/>
+            <c:chart xmlns:r="http://schemas.openxmlformats.org/officeDocument/2006/relationships" xmlns:c="http://schemas.openxmlformats.org/drawingml/2006/chart" r:id="R156b92a98d2c4ba1"/>
           </a:graphicData>
         </a:graphic>
       </p:graphicFrame>
       <p:graphicFrame>
         <p:nvGraphicFramePr>
-          <p:cNvPr id="10013" name="legend.overlay=true"/>
+          <p:cNvPr id="100013" name="legend.overlay=true"/>
           <p:cNvGraphicFramePr/>
           <p:nvPr/>
         </p:nvGraphicFramePr>
@@ -8969,13 +8995,13 @@
         </p:xfrm>
         <a:graphic xmlns:a="http://schemas.openxmlformats.org/drawingml/2006/main">
           <a:graphicData uri="http://schemas.openxmlformats.org/drawingml/2006/chart">
-            <c:chart xmlns:r="http://schemas.openxmlformats.org/officeDocument/2006/relationships" xmlns:c="http://schemas.openxmlformats.org/drawingml/2006/chart" r:id="R68fee56bf72440ec"/>
+            <c:chart xmlns:r="http://schemas.openxmlformats.org/officeDocument/2006/relationships" xmlns:c="http://schemas.openxmlformats.org/drawingml/2006/chart" r:id="R47dc8c52522f4d7d"/>
           </a:graphicData>
         </a:graphic>
       </p:graphicFrame>
       <p:graphicFrame>
         <p:nvGraphicFramePr>
-          <p:cNvPr id="10014" name="Chart 4"/>
+          <p:cNvPr id="100014" name="Chart 4"/>
           <p:cNvGraphicFramePr/>
           <p:nvPr/>
         </p:nvGraphicFramePr>
@@ -8985,7 +9011,7 @@
         </p:xfrm>
         <a:graphic xmlns:a="http://schemas.openxmlformats.org/drawingml/2006/main">
           <a:graphicData uri="http://schemas.openxmlformats.org/drawingml/2006/chart">
-            <c:chart xmlns:r="http://schemas.openxmlformats.org/officeDocument/2006/relationships" xmlns:c="http://schemas.openxmlformats.org/drawingml/2006/chart" r:id="R68c65dd1f3134ad3"/>
+            <c:chart xmlns:r="http://schemas.openxmlformats.org/officeDocument/2006/relationships" xmlns:c="http://schemas.openxmlformats.org/drawingml/2006/chart" r:id="R37ccd7d83ab64ddd"/>
           </a:graphicData>
         </a:graphic>
       </p:graphicFrame>
@@ -9006,8 +9032,8 @@
       <p:grpSpPr/>
       <p:sp>
         <p:nvSpPr>
-          <p:cNvPr id="10015" name="TextBox 1"/>
-          <p:cNvSpPr/>
+          <p:cNvPr id="100015" name="TextBox 1"/>
+          <p:cNvSpPr txBox="1"/>
           <p:nvPr/>
         </p:nvSpPr>
         <p:spPr>
@@ -9034,7 +9060,7 @@
       </p:sp>
       <p:graphicFrame>
         <p:nvGraphicFramePr>
-          <p:cNvPr id="10016" name="dataLabels=value"/>
+          <p:cNvPr id="100016" name="dataLabels=value"/>
           <p:cNvGraphicFramePr/>
           <p:nvPr/>
         </p:nvGraphicFramePr>
@@ -9044,13 +9070,13 @@
         </p:xfrm>
         <a:graphic xmlns:a="http://schemas.openxmlformats.org/drawingml/2006/main">
           <a:graphicData uri="http://schemas.openxmlformats.org/drawingml/2006/chart">
-            <c:chart xmlns:r="http://schemas.openxmlformats.org/officeDocument/2006/relationships" xmlns:c="http://schemas.openxmlformats.org/drawingml/2006/chart" r:id="R1ec1ed77402e4c47"/>
+            <c:chart xmlns:r="http://schemas.openxmlformats.org/officeDocument/2006/relationships" xmlns:c="http://schemas.openxmlformats.org/drawingml/2006/chart" r:id="R5d13d6ce33ee4494"/>
           </a:graphicData>
         </a:graphic>
       </p:graphicFrame>
       <p:graphicFrame>
         <p:nvGraphicFramePr>
-          <p:cNvPr id="10017" name="value,series"/>
+          <p:cNvPr id="100017" name="value,series"/>
           <p:cNvGraphicFramePr/>
           <p:nvPr/>
         </p:nvGraphicFramePr>
@@ -9060,13 +9086,13 @@
         </p:xfrm>
         <a:graphic xmlns:a="http://schemas.openxmlformats.org/drawingml/2006/main">
           <a:graphicData uri="http://schemas.openxmlformats.org/drawingml/2006/chart">
-            <c:chart xmlns:r="http://schemas.openxmlformats.org/officeDocument/2006/relationships" xmlns:c="http://schemas.openxmlformats.org/drawingml/2006/chart" r:id="Rea677ce6a1f24c96"/>
+            <c:chart xmlns:r="http://schemas.openxmlformats.org/officeDocument/2006/relationships" xmlns:c="http://schemas.openxmlformats.org/drawingml/2006/chart" r:id="Rb75982600ade49e2"/>
           </a:graphicData>
         </a:graphic>
       </p:graphicFrame>
       <p:graphicFrame>
         <p:nvGraphicFramePr>
-          <p:cNvPr id="10018" name="value,category"/>
+          <p:cNvPr id="100018" name="value,category"/>
           <p:cNvGraphicFramePr/>
           <p:nvPr/>
         </p:nvGraphicFramePr>
@@ -9076,13 +9102,13 @@
         </p:xfrm>
         <a:graphic xmlns:a="http://schemas.openxmlformats.org/drawingml/2006/main">
           <a:graphicData uri="http://schemas.openxmlformats.org/drawingml/2006/chart">
-            <c:chart xmlns:r="http://schemas.openxmlformats.org/officeDocument/2006/relationships" xmlns:c="http://schemas.openxmlformats.org/drawingml/2006/chart" r:id="R80ccc038a9b6453d"/>
+            <c:chart xmlns:r="http://schemas.openxmlformats.org/officeDocument/2006/relationships" xmlns:c="http://schemas.openxmlformats.org/drawingml/2006/chart" r:id="R7a453fb0db154e3b"/>
           </a:graphicData>
         </a:graphic>
       </p:graphicFrame>
       <p:graphicFrame>
         <p:nvGraphicFramePr>
-          <p:cNvPr id="10019" name="dataLabels=none"/>
+          <p:cNvPr id="100019" name="dataLabels=none"/>
           <p:cNvGraphicFramePr/>
           <p:nvPr/>
         </p:nvGraphicFramePr>
@@ -9092,7 +9118,7 @@
         </p:xfrm>
         <a:graphic xmlns:a="http://schemas.openxmlformats.org/drawingml/2006/main">
           <a:graphicData uri="http://schemas.openxmlformats.org/drawingml/2006/chart">
-            <c:chart xmlns:r="http://schemas.openxmlformats.org/officeDocument/2006/relationships" xmlns:c="http://schemas.openxmlformats.org/drawingml/2006/chart" r:id="Rf095d7cac7f74b2f"/>
+            <c:chart xmlns:r="http://schemas.openxmlformats.org/officeDocument/2006/relationships" xmlns:c="http://schemas.openxmlformats.org/drawingml/2006/chart" r:id="R5d29cf82632c4a93"/>
           </a:graphicData>
         </a:graphic>
       </p:graphicFrame>
@@ -9113,8 +9139,8 @@
       <p:grpSpPr/>
       <p:sp>
         <p:nvSpPr>
-          <p:cNvPr id="10020" name="TextBox 1"/>
-          <p:cNvSpPr/>
+          <p:cNvPr id="100020" name="TextBox 1"/>
+          <p:cNvSpPr txBox="1"/>
           <p:nvPr/>
         </p:nvSpPr>
         <p:spPr>
@@ -9141,7 +9167,7 @@
       </p:sp>
       <p:graphicFrame>
         <p:nvGraphicFramePr>
-          <p:cNvPr id="10021" name="min/max + titles"/>
+          <p:cNvPr id="100021" name="min/max + titles"/>
           <p:cNvGraphicFramePr/>
           <p:nvPr/>
         </p:nvGraphicFramePr>
@@ -9151,13 +9177,13 @@
         </p:xfrm>
         <a:graphic xmlns:a="http://schemas.openxmlformats.org/drawingml/2006/main">
           <a:graphicData uri="http://schemas.openxmlformats.org/drawingml/2006/chart">
-            <c:chart xmlns:r="http://schemas.openxmlformats.org/officeDocument/2006/relationships" xmlns:c="http://schemas.openxmlformats.org/drawingml/2006/chart" r:id="Redff79a8efd247da"/>
+            <c:chart xmlns:r="http://schemas.openxmlformats.org/officeDocument/2006/relationships" xmlns:c="http://schemas.openxmlformats.org/drawingml/2006/chart" r:id="R0adc1fbc345e42c0"/>
           </a:graphicData>
         </a:graphic>
       </p:graphicFrame>
       <p:graphicFrame>
         <p:nvGraphicFramePr>
-          <p:cNvPr id="10022" name="gridlines + minorGridlines"/>
+          <p:cNvPr id="100022" name="gridlines + minorGridlines"/>
           <p:cNvGraphicFramePr/>
           <p:nvPr/>
         </p:nvGraphicFramePr>
@@ -9167,13 +9193,13 @@
         </p:xfrm>
         <a:graphic xmlns:a="http://schemas.openxmlformats.org/drawingml/2006/main">
           <a:graphicData uri="http://schemas.openxmlformats.org/drawingml/2006/chart">
-            <c:chart xmlns:r="http://schemas.openxmlformats.org/officeDocument/2006/relationships" xmlns:c="http://schemas.openxmlformats.org/drawingml/2006/chart" r:id="R25f15bad9e8e4267"/>
+            <c:chart xmlns:r="http://schemas.openxmlformats.org/officeDocument/2006/relationships" xmlns:c="http://schemas.openxmlformats.org/drawingml/2006/chart" r:id="R1e5a9a791aed443d"/>
           </a:graphicData>
         </a:graphic>
       </p:graphicFrame>
       <p:graphicFrame>
         <p:nvGraphicFramePr>
-          <p:cNvPr id="10023" name="labelrotation=-30"/>
+          <p:cNvPr id="100023" name="labelrotation=-30"/>
           <p:cNvGraphicFramePr/>
           <p:nvPr/>
         </p:nvGraphicFramePr>
@@ -9183,13 +9209,13 @@
         </p:xfrm>
         <a:graphic xmlns:a="http://schemas.openxmlformats.org/drawingml/2006/main">
           <a:graphicData uri="http://schemas.openxmlformats.org/drawingml/2006/chart">
-            <c:chart xmlns:r="http://schemas.openxmlformats.org/officeDocument/2006/relationships" xmlns:c="http://schemas.openxmlformats.org/drawingml/2006/chart" r:id="R1cbd1653ce3747b7"/>
+            <c:chart xmlns:r="http://schemas.openxmlformats.org/officeDocument/2006/relationships" xmlns:c="http://schemas.openxmlformats.org/drawingml/2006/chart" r:id="R4949e361640f421d"/>
           </a:graphicData>
         </a:graphic>
       </p:graphicFrame>
       <p:graphicFrame>
         <p:nvGraphicFramePr>
-          <p:cNvPr id="10024" name="dispunits=hundreds"/>
+          <p:cNvPr id="100024" name="dispunits=hundreds"/>
           <p:cNvGraphicFramePr/>
           <p:nvPr/>
         </p:nvGraphicFramePr>
@@ -9199,7 +9225,7 @@
         </p:xfrm>
         <a:graphic xmlns:a="http://schemas.openxmlformats.org/drawingml/2006/main">
           <a:graphicData uri="http://schemas.openxmlformats.org/drawingml/2006/chart">
-            <c:chart xmlns:r="http://schemas.openxmlformats.org/officeDocument/2006/relationships" xmlns:c="http://schemas.openxmlformats.org/drawingml/2006/chart" r:id="Rfdb9539a74bb41be"/>
+            <c:chart xmlns:r="http://schemas.openxmlformats.org/officeDocument/2006/relationships" xmlns:c="http://schemas.openxmlformats.org/drawingml/2006/chart" r:id="R50cb4c4f430e42f2"/>
           </a:graphicData>
         </a:graphic>
       </p:graphicFrame>
@@ -9220,8 +9246,8 @@
       <p:grpSpPr/>
       <p:sp>
         <p:nvSpPr>
-          <p:cNvPr id="10025" name="TextBox 1"/>
-          <p:cNvSpPr/>
+          <p:cNvPr id="100025" name="TextBox 1"/>
+          <p:cNvSpPr txBox="1"/>
           <p:nvPr/>
         </p:nvSpPr>
         <p:spPr>
@@ -9248,7 +9274,7 @@
       </p:sp>
       <p:graphicFrame>
         <p:nvGraphicFramePr>
-          <p:cNvPr id="10026" name="colors"/>
+          <p:cNvPr id="100026" name="colors"/>
           <p:cNvGraphicFramePr/>
           <p:nvPr/>
         </p:nvGraphicFramePr>
@@ -9258,13 +9284,13 @@
         </p:xfrm>
         <a:graphic xmlns:a="http://schemas.openxmlformats.org/drawingml/2006/main">
           <a:graphicData uri="http://schemas.openxmlformats.org/drawingml/2006/chart">
-            <c:chart xmlns:r="http://schemas.openxmlformats.org/officeDocument/2006/relationships" xmlns:c="http://schemas.openxmlformats.org/drawingml/2006/chart" r:id="R084a09466f384e65"/>
+            <c:chart xmlns:r="http://schemas.openxmlformats.org/officeDocument/2006/relationships" xmlns:c="http://schemas.openxmlformats.org/drawingml/2006/chart" r:id="Raa3929d6e98148f5"/>
           </a:graphicData>
         </a:graphic>
       </p:graphicFrame>
       <p:graphicFrame>
         <p:nvGraphicFramePr>
-          <p:cNvPr id="10027" name="seriesoutline"/>
+          <p:cNvPr id="100027" name="seriesoutline"/>
           <p:cNvGraphicFramePr/>
           <p:nvPr/>
         </p:nvGraphicFramePr>
@@ -9274,13 +9300,13 @@
         </p:xfrm>
         <a:graphic xmlns:a="http://schemas.openxmlformats.org/drawingml/2006/main">
           <a:graphicData uri="http://schemas.openxmlformats.org/drawingml/2006/chart">
-            <c:chart xmlns:r="http://schemas.openxmlformats.org/officeDocument/2006/relationships" xmlns:c="http://schemas.openxmlformats.org/drawingml/2006/chart" r:id="R185ca650da7d4c8b"/>
+            <c:chart xmlns:r="http://schemas.openxmlformats.org/officeDocument/2006/relationships" xmlns:c="http://schemas.openxmlformats.org/drawingml/2006/chart" r:id="R97c54cb3dbd64801"/>
           </a:graphicData>
         </a:graphic>
       </p:graphicFrame>
       <p:graphicFrame>
         <p:nvGraphicFramePr>
-          <p:cNvPr id="10028" name="transparency=30"/>
+          <p:cNvPr id="100028" name="transparency=30"/>
           <p:cNvGraphicFramePr/>
           <p:nvPr/>
         </p:nvGraphicFramePr>
@@ -9290,13 +9316,13 @@
         </p:xfrm>
         <a:graphic xmlns:a="http://schemas.openxmlformats.org/drawingml/2006/main">
           <a:graphicData uri="http://schemas.openxmlformats.org/drawingml/2006/chart">
-            <c:chart xmlns:r="http://schemas.openxmlformats.org/officeDocument/2006/relationships" xmlns:c="http://schemas.openxmlformats.org/drawingml/2006/chart" r:id="R8a4ddee87e00429f"/>
+            <c:chart xmlns:r="http://schemas.openxmlformats.org/officeDocument/2006/relationships" xmlns:c="http://schemas.openxmlformats.org/drawingml/2006/chart" r:id="R139a4924b6cc48dd"/>
           </a:graphicData>
         </a:graphic>
       </p:graphicFrame>
       <p:graphicFrame>
         <p:nvGraphicFramePr>
-          <p:cNvPr id="10029" name="seriesshadow"/>
+          <p:cNvPr id="100029" name="seriesshadow"/>
           <p:cNvGraphicFramePr/>
           <p:nvPr/>
         </p:nvGraphicFramePr>
@@ -9306,7 +9332,7 @@
         </p:xfrm>
         <a:graphic xmlns:a="http://schemas.openxmlformats.org/drawingml/2006/main">
           <a:graphicData uri="http://schemas.openxmlformats.org/drawingml/2006/chart">
-            <c:chart xmlns:r="http://schemas.openxmlformats.org/officeDocument/2006/relationships" xmlns:c="http://schemas.openxmlformats.org/drawingml/2006/chart" r:id="R30b0d35edb5c4d50"/>
+            <c:chart xmlns:r="http://schemas.openxmlformats.org/officeDocument/2006/relationships" xmlns:c="http://schemas.openxmlformats.org/drawingml/2006/chart" r:id="R3ce35fc01abb4793"/>
           </a:graphicData>
         </a:graphic>
       </p:graphicFrame>
@@ -9327,8 +9353,8 @@
       <p:grpSpPr/>
       <p:sp>
         <p:nvSpPr>
-          <p:cNvPr id="10030" name="TextBox 1"/>
-          <p:cNvSpPr/>
+          <p:cNvPr id="100030" name="TextBox 1"/>
+          <p:cNvSpPr txBox="1"/>
           <p:nvPr/>
         </p:nvSpPr>
         <p:spPr>
@@ -9355,7 +9381,7 @@
       </p:sp>
       <p:graphicFrame>
         <p:nvGraphicFramePr>
-          <p:cNvPr id="10031" name="chartareafill + plotFill + borders"/>
+          <p:cNvPr id="100031" name="chartareafill + plotFill + borders"/>
           <p:cNvGraphicFramePr/>
           <p:nvPr/>
         </p:nvGraphicFramePr>
@@ -9365,13 +9391,13 @@
         </p:xfrm>
         <a:graphic xmlns:a="http://schemas.openxmlformats.org/drawingml/2006/main">
           <a:graphicData uri="http://schemas.openxmlformats.org/drawingml/2006/chart">
-            <c:chart xmlns:r="http://schemas.openxmlformats.org/officeDocument/2006/relationships" xmlns:c="http://schemas.openxmlformats.org/drawingml/2006/chart" r:id="Raa6b73b9c81842cb"/>
+            <c:chart xmlns:r="http://schemas.openxmlformats.org/officeDocument/2006/relationships" xmlns:c="http://schemas.openxmlformats.org/drawingml/2006/chart" r:id="R3b9455b83932478f"/>
           </a:graphicData>
         </a:graphic>
       </p:graphicFrame>
       <p:graphicFrame>
         <p:nvGraphicFramePr>
-          <p:cNvPr id="10032" name="roundedcorners=true"/>
+          <p:cNvPr id="100032" name="roundedcorners=true"/>
           <p:cNvGraphicFramePr/>
           <p:nvPr/>
         </p:nvGraphicFramePr>
@@ -9381,13 +9407,13 @@
         </p:xfrm>
         <a:graphic xmlns:a="http://schemas.openxmlformats.org/drawingml/2006/main">
           <a:graphicData uri="http://schemas.openxmlformats.org/drawingml/2006/chart">
-            <c:chart xmlns:r="http://schemas.openxmlformats.org/officeDocument/2006/relationships" xmlns:c="http://schemas.openxmlformats.org/drawingml/2006/chart" r:id="Ra58607ffd8c047e8"/>
+            <c:chart xmlns:r="http://schemas.openxmlformats.org/officeDocument/2006/relationships" xmlns:c="http://schemas.openxmlformats.org/drawingml/2006/chart" r:id="R815cc26f08f04b73"/>
           </a:graphicData>
         </a:graphic>
       </p:graphicFrame>
       <p:graphicFrame>
         <p:nvGraphicFramePr>
-          <p:cNvPr id="10033" name="plotFill=none"/>
+          <p:cNvPr id="100033" name="plotFill=none"/>
           <p:cNvGraphicFramePr/>
           <p:nvPr/>
         </p:nvGraphicFramePr>
@@ -9397,13 +9423,13 @@
         </p:xfrm>
         <a:graphic xmlns:a="http://schemas.openxmlformats.org/drawingml/2006/main">
           <a:graphicData uri="http://schemas.openxmlformats.org/drawingml/2006/chart">
-            <c:chart xmlns:r="http://schemas.openxmlformats.org/officeDocument/2006/relationships" xmlns:c="http://schemas.openxmlformats.org/drawingml/2006/chart" r:id="R1b73298401a649c5"/>
+            <c:chart xmlns:r="http://schemas.openxmlformats.org/officeDocument/2006/relationships" xmlns:c="http://schemas.openxmlformats.org/drawingml/2006/chart" r:id="R117d42c35b344478"/>
           </a:graphicData>
         </a:graphic>
       </p:graphicFrame>
       <p:graphicFrame>
         <p:nvGraphicFramePr>
-          <p:cNvPr id="10034" name="chartareafill=none"/>
+          <p:cNvPr id="100034" name="chartareafill=none"/>
           <p:cNvGraphicFramePr/>
           <p:nvPr/>
         </p:nvGraphicFramePr>
@@ -9413,7 +9439,7 @@
         </p:xfrm>
         <a:graphic xmlns:a="http://schemas.openxmlformats.org/drawingml/2006/main">
           <a:graphicData uri="http://schemas.openxmlformats.org/drawingml/2006/chart">
-            <c:chart xmlns:r="http://schemas.openxmlformats.org/officeDocument/2006/relationships" xmlns:c="http://schemas.openxmlformats.org/drawingml/2006/chart" r:id="R3f5caca8011e4fc4"/>
+            <c:chart xmlns:r="http://schemas.openxmlformats.org/officeDocument/2006/relationships" xmlns:c="http://schemas.openxmlformats.org/drawingml/2006/chart" r:id="Rda62aa4a2e3c49f2"/>
           </a:graphicData>
         </a:graphic>
       </p:graphicFrame>
@@ -9434,8 +9460,8 @@
       <p:grpSpPr/>
       <p:sp>
         <p:nvSpPr>
-          <p:cNvPr id="10035" name="TextBox 1"/>
-          <p:cNvSpPr/>
+          <p:cNvPr id="100035" name="TextBox 1"/>
+          <p:cNvSpPr txBox="1"/>
           <p:nvPr/>
         </p:nvSpPr>
         <p:spPr>
@@ -9462,7 +9488,7 @@
       </p:sp>
       <p:graphicFrame>
         <p:nvGraphicFramePr>
-          <p:cNvPr id="10036" name="preset=minimal"/>
+          <p:cNvPr id="100036" name="preset=minimal"/>
           <p:cNvGraphicFramePr/>
           <p:nvPr/>
         </p:nvGraphicFramePr>
@@ -9472,13 +9498,13 @@
         </p:xfrm>
         <a:graphic xmlns:a="http://schemas.openxmlformats.org/drawingml/2006/main">
           <a:graphicData uri="http://schemas.openxmlformats.org/drawingml/2006/chart">
-            <c:chart xmlns:r="http://schemas.openxmlformats.org/officeDocument/2006/relationships" xmlns:c="http://schemas.openxmlformats.org/drawingml/2006/chart" r:id="R5fd4b77fbbb949a0"/>
+            <c:chart xmlns:r="http://schemas.openxmlformats.org/officeDocument/2006/relationships" xmlns:c="http://schemas.openxmlformats.org/drawingml/2006/chart" r:id="R831608c9c6c54d0d"/>
           </a:graphicData>
         </a:graphic>
       </p:graphicFrame>
       <p:graphicFrame>
         <p:nvGraphicFramePr>
-          <p:cNvPr id="10037" name="preset=dark"/>
+          <p:cNvPr id="100037" name="preset=dark"/>
           <p:cNvGraphicFramePr/>
           <p:nvPr/>
         </p:nvGraphicFramePr>
@@ -9488,13 +9514,13 @@
         </p:xfrm>
         <a:graphic xmlns:a="http://schemas.openxmlformats.org/drawingml/2006/main">
           <a:graphicData uri="http://schemas.openxmlformats.org/drawingml/2006/chart">
-            <c:chart xmlns:r="http://schemas.openxmlformats.org/officeDocument/2006/relationships" xmlns:c="http://schemas.openxmlformats.org/drawingml/2006/chart" r:id="Rd83bc46789504e54"/>
+            <c:chart xmlns:r="http://schemas.openxmlformats.org/officeDocument/2006/relationships" xmlns:c="http://schemas.openxmlformats.org/drawingml/2006/chart" r:id="Ra2601dddc298492a"/>
           </a:graphicData>
         </a:graphic>
       </p:graphicFrame>
       <p:graphicFrame>
         <p:nvGraphicFramePr>
-          <p:cNvPr id="10038" name="preset=corporate"/>
+          <p:cNvPr id="100038" name="preset=corporate"/>
           <p:cNvGraphicFramePr/>
           <p:nvPr/>
         </p:nvGraphicFramePr>
@@ -9504,13 +9530,13 @@
         </p:xfrm>
         <a:graphic xmlns:a="http://schemas.openxmlformats.org/drawingml/2006/main">
           <a:graphicData uri="http://schemas.openxmlformats.org/drawingml/2006/chart">
-            <c:chart xmlns:r="http://schemas.openxmlformats.org/officeDocument/2006/relationships" xmlns:c="http://schemas.openxmlformats.org/drawingml/2006/chart" r:id="R4d717a2fe7e1438a"/>
+            <c:chart xmlns:r="http://schemas.openxmlformats.org/officeDocument/2006/relationships" xmlns:c="http://schemas.openxmlformats.org/drawingml/2006/chart" r:id="Rd952923841cc4f5b"/>
           </a:graphicData>
         </a:graphic>
       </p:graphicFrame>
       <p:graphicFrame>
         <p:nvGraphicFramePr>
-          <p:cNvPr id="10039" name="chart-series Set name+color"/>
+          <p:cNvPr id="100039" name="chart-series Set name+color"/>
           <p:cNvGraphicFramePr/>
           <p:nvPr/>
         </p:nvGraphicFramePr>
@@ -9520,7 +9546,7 @@
         </p:xfrm>
         <a:graphic xmlns:a="http://schemas.openxmlformats.org/drawingml/2006/main">
           <a:graphicData uri="http://schemas.openxmlformats.org/drawingml/2006/chart">
-            <c:chart xmlns:r="http://schemas.openxmlformats.org/officeDocument/2006/relationships" xmlns:c="http://schemas.openxmlformats.org/drawingml/2006/chart" r:id="R138c5257b7384dcb"/>
+            <c:chart xmlns:r="http://schemas.openxmlformats.org/officeDocument/2006/relationships" xmlns:c="http://schemas.openxmlformats.org/drawingml/2006/chart" r:id="R21cc3ac5acfe4b9b"/>
           </a:graphicData>
         </a:graphic>
       </p:graphicFrame>
